--- a/template.pptx
+++ b/template.pptx
@@ -3822,11 +3822,11 @@
     </a:clrScheme>
     <a:fontScheme name="Office">
       <a:majorFont>
-        <a:latin typeface="맑은 고딕"/>
-        <a:ea typeface=""/>
+        <a:latin typeface="Pretendard"/>
+        <a:ea typeface="Pretendard"/>
         <a:cs typeface=""/>
         <a:font script="Jpan" typeface="MS PGothic"/>
-        <a:font script="Hang" typeface="맑은 고딕"/>
+        <a:font script="Hang" typeface="Pretendard"/>
         <a:font script="Hans" typeface="SimSun"/>
         <a:font script="Hant" typeface="PMingLiU"/>
         <a:font script="Arab" typeface="Times New Roman"/>
@@ -3856,11 +3856,11 @@
         <a:font script="Uigh" typeface="Microsoft Uighur"/>
       </a:majorFont>
       <a:minorFont>
-        <a:latin typeface="맑은 고딕"/>
-        <a:ea typeface=""/>
+        <a:latin typeface="Pretendard"/>
+        <a:ea typeface="Pretendard"/>
         <a:cs typeface=""/>
         <a:font script="Jpan" typeface="MS PGothic"/>
-        <a:font script="Hang" typeface="맑은 고딕"/>
+        <a:font script="Hang" typeface="Pretendard"/>
         <a:font script="Hans" typeface="SimSun"/>
         <a:font script="Hant" typeface="PMingLiU"/>
         <a:font script="Arab" typeface="Arial"/>

--- a/template.pptx
+++ b/template.pptx
@@ -1,6 +1,6 @@
 
 <file path=ppt/presentation.xml><?xml version="1.0" encoding="utf-8"?>
-<p:presentation xmlns:a="http://schemas.openxmlformats.org/drawingml/2006/main" xmlns:r="http://schemas.openxmlformats.org/officeDocument/2006/relationships" xmlns:p="http://schemas.openxmlformats.org/presentationml/2006/main" saveSubsetFonts="1">
+<p:presentation xmlns:a="http://schemas.openxmlformats.org/drawingml/2006/main" xmlns:r="http://schemas.openxmlformats.org/officeDocument/2006/relationships" xmlns:p="http://schemas.openxmlformats.org/presentationml/2006/main" embedTrueTypeFonts="1">
   <p:sldMasterIdLst>
     <p:sldMasterId id="2147483660" r:id="rId1"/>
   </p:sldMasterIdLst>
@@ -12,6 +12,13 @@
   </p:sldIdLst>
   <p:sldSz cx="9144000" cy="5143500" type="screen16x9"/>
   <p:notesSz cx="6858000" cy="9144000"/>
+  <p:embeddedFontLst>
+    <p:embeddedFont>
+      <p:font typeface="Pretendard" panose="02000503000000020004" pitchFamily="2" charset="-127"/>
+      <p:regular r:id="rId4"/>
+      <p:bold r:id="rId5"/>
+    </p:embeddedFont>
+  </p:embeddedFontLst>
   <p:defaultTextStyle>
     <a:defPPr>
       <a:defRPr lang="ko-KR"/>
@@ -217,7 +224,7 @@
               <a:pPr lvl="0">
                 <a:defRPr lang="ko-KR" altLang="en-US"/>
               </a:pPr>
-              <a:t>2025. 5. 10.</a:t>
+              <a:t>2026. 10. 12.</a:t>
             </a:fld>
             <a:endParaRPr lang="ko-KR" altLang="en-US"/>
           </a:p>
@@ -684,7 +691,7 @@
             <a:fld id="{CCC3D61B-4551-4FD2-AA00-C6D5670339EB}" type="datetimeFigureOut">
               <a:rPr lang="ko-KR" altLang="en-US" smtClean="0"/>
               <a:pPr/>
-              <a:t>2025. 5. 10.</a:t>
+              <a:t>2026. 10. 12.</a:t>
             </a:fld>
             <a:endParaRPr lang="ko-KR" altLang="en-US"/>
           </a:p>
@@ -867,7 +874,7 @@
               <a:pPr lvl="0">
                 <a:defRPr lang="ko-KR" altLang="en-US"/>
               </a:pPr>
-              <a:t>2025. 5. 10.</a:t>
+              <a:t>2026. 10. 12.</a:t>
             </a:fld>
             <a:endParaRPr lang="ko-KR" altLang="en-US"/>
           </a:p>
@@ -1069,7 +1076,7 @@
               <a:pPr lvl="0">
                 <a:defRPr lang="ko-KR" altLang="en-US"/>
               </a:pPr>
-              <a:t>2025. 5. 10.</a:t>
+              <a:t>2026. 10. 12.</a:t>
             </a:fld>
             <a:endParaRPr lang="ko-KR" altLang="en-US"/>
           </a:p>
@@ -1261,7 +1268,7 @@
               <a:pPr lvl="0">
                 <a:defRPr lang="ko-KR" altLang="en-US"/>
               </a:pPr>
-              <a:t>2025. 5. 10.</a:t>
+              <a:t>2026. 10. 12.</a:t>
             </a:fld>
             <a:endParaRPr lang="ko-KR" altLang="en-US"/>
           </a:p>
@@ -1522,7 +1529,7 @@
               <a:pPr lvl="0">
                 <a:defRPr lang="ko-KR" altLang="en-US"/>
               </a:pPr>
-              <a:t>2025. 5. 10.</a:t>
+              <a:t>2026. 10. 12.</a:t>
             </a:fld>
             <a:endParaRPr lang="ko-KR" altLang="en-US"/>
           </a:p>
@@ -1841,7 +1848,7 @@
               <a:pPr lvl="0">
                 <a:defRPr lang="ko-KR" altLang="en-US"/>
               </a:pPr>
-              <a:t>2025. 5. 10.</a:t>
+              <a:t>2026. 10. 12.</a:t>
             </a:fld>
             <a:endParaRPr lang="ko-KR" altLang="en-US"/>
           </a:p>
@@ -2303,7 +2310,7 @@
               <a:pPr lvl="0">
                 <a:defRPr lang="ko-KR" altLang="en-US"/>
               </a:pPr>
-              <a:t>2025. 5. 10.</a:t>
+              <a:t>2026. 10. 12.</a:t>
             </a:fld>
             <a:endParaRPr lang="ko-KR" altLang="en-US"/>
           </a:p>
@@ -2434,7 +2441,7 @@
               <a:pPr lvl="0">
                 <a:defRPr lang="ko-KR" altLang="en-US"/>
               </a:pPr>
-              <a:t>2025. 5. 10.</a:t>
+              <a:t>2026. 10. 12.</a:t>
             </a:fld>
             <a:endParaRPr lang="ko-KR" altLang="en-US"/>
           </a:p>
@@ -2540,7 +2547,7 @@
               <a:pPr lvl="0">
                 <a:defRPr lang="ko-KR" altLang="en-US"/>
               </a:pPr>
-              <a:t>2025. 5. 10.</a:t>
+              <a:t>2026. 10. 12.</a:t>
             </a:fld>
             <a:endParaRPr lang="ko-KR" altLang="en-US"/>
           </a:p>
@@ -2841,7 +2848,7 @@
               <a:pPr lvl="0">
                 <a:defRPr lang="ko-KR" altLang="en-US"/>
               </a:pPr>
-              <a:t>2025. 5. 10.</a:t>
+              <a:t>2026. 10. 12.</a:t>
             </a:fld>
             <a:endParaRPr lang="ko-KR" altLang="en-US"/>
           </a:p>
@@ -3112,7 +3119,7 @@
               <a:pPr lvl="0">
                 <a:defRPr lang="ko-KR" altLang="en-US"/>
               </a:pPr>
-              <a:t>2025. 5. 10.</a:t>
+              <a:t>2026. 10. 12.</a:t>
             </a:fld>
             <a:endParaRPr lang="ko-KR" altLang="en-US"/>
           </a:p>
@@ -3329,7 +3336,7 @@
             <a:fld id="{CCC3D61B-4551-4FD2-AA00-C6D5670339EB}" type="datetimeFigureOut">
               <a:rPr lang="ko-KR" altLang="en-US" smtClean="0"/>
               <a:pPr/>
-              <a:t>2025. 5. 10.</a:t>
+              <a:t>2026. 10. 12.</a:t>
             </a:fld>
             <a:endParaRPr lang="ko-KR" altLang="en-US"/>
           </a:p>
@@ -3772,7 +3779,7 @@
     <mc:Choice Requires="p14">
       <p:transition/>
     </mc:Choice>
-    <mc:Fallback xmlns="" xmlns:c="http://schemas.openxmlformats.org/drawingml/2006/chart" xmlns:dgm="http://schemas.openxmlformats.org/drawingml/2006/diagram" xmlns:dsp="http://schemas.microsoft.com/office/drawing/2008/diagram">
+    <mc:Fallback xmlns:dsp="http://schemas.microsoft.com/office/drawing/2008/diagram" xmlns:dgm="http://schemas.openxmlformats.org/drawingml/2006/diagram" xmlns:c="http://schemas.openxmlformats.org/drawingml/2006/chart" xmlns="">
       <p:transition/>
     </mc:Fallback>
   </mc:AlternateContent>
@@ -4105,14 +4112,14 @@
     </a:clrScheme>
     <a:fontScheme name="한컴오피스">
       <a:majorFont>
-        <a:latin typeface="함초롬돋움"/>
-        <a:ea typeface="함초롬돋움"/>
-        <a:cs typeface="함초롬돋움"/>
+        <a:latin typeface="Pretendard"/>
+        <a:ea typeface="Pretendard"/>
+        <a:cs typeface="Pretendard"/>
       </a:majorFont>
       <a:minorFont>
-        <a:latin typeface="함초롬돋움"/>
-        <a:ea typeface="함초롬돋움"/>
-        <a:cs typeface="함초롬돋움"/>
+        <a:latin typeface="Pretendard"/>
+        <a:ea typeface="Pretendard"/>
+        <a:cs typeface="Pretendard"/>
       </a:minorFont>
     </a:fontScheme>
     <a:fmtScheme name="한컴오피스">

--- a/template.pptx
+++ b/template.pptx
@@ -3189,9 +3189,12 @@
 <p:sldMaster xmlns:a="http://schemas.openxmlformats.org/drawingml/2006/main" xmlns:r="http://schemas.openxmlformats.org/officeDocument/2006/relationships" xmlns:p="http://schemas.openxmlformats.org/presentationml/2006/main">
   <p:cSld>
     <p:bg>
-      <p:bgRef idx="1001">
-        <a:schemeClr val="bg1"/>
-      </p:bgRef>
+      <p:bgPr>
+        <a:solidFill>
+          <a:srgbClr val="000000"/>
+        </a:solidFill>
+        <a:effectLst/>
+      </p:bgPr>
     </p:bg>
     <p:spTree>
       <p:nvGrpSpPr>
@@ -3737,34 +3740,52 @@
             </a:pPr>
             <a:r>
               <a:rPr lang="ko-KR" altLang="en-US" sz="4200" b="1" dirty="0">
+                <a:solidFill>
+                  <a:srgbClr val="FFFFFF"/>
+                </a:solidFill>
                 <a:latin typeface="+mn-lt"/>
               </a:rPr>
               <a:t>가사 </a:t>
             </a:r>
             <a:r>
               <a:rPr lang="en-US" altLang="ko-KR" sz="4200" b="1" dirty="0">
+                <a:solidFill>
+                  <a:srgbClr val="FFFFFF"/>
+                </a:solidFill>
                 <a:latin typeface="+mn-lt"/>
               </a:rPr>
               <a:t>1</a:t>
             </a:r>
             <a:br>
               <a:rPr lang="en-US" altLang="ko-KR" sz="4200" b="1" dirty="0">
+                <a:solidFill>
+                  <a:srgbClr val="FFFFFF"/>
+                </a:solidFill>
                 <a:latin typeface="+mn-lt"/>
               </a:rPr>
             </a:br>
             <a:r>
               <a:rPr lang="ko-KR" altLang="en-US" sz="4200" b="1" dirty="0">
+                <a:solidFill>
+                  <a:srgbClr val="FFFFFF"/>
+                </a:solidFill>
                 <a:latin typeface="+mn-lt"/>
               </a:rPr>
               <a:t>가사 </a:t>
             </a:r>
             <a:r>
               <a:rPr lang="en-US" altLang="ko-KR" sz="4200" b="1" dirty="0">
+                <a:solidFill>
+                  <a:srgbClr val="FFFFFF"/>
+                </a:solidFill>
                 <a:latin typeface="+mn-lt"/>
               </a:rPr>
               <a:t>2</a:t>
             </a:r>
             <a:endParaRPr lang="ko-KR" altLang="en-US" sz="4200" b="1" dirty="0">
+              <a:solidFill>
+                <a:srgbClr val="FFFFFF"/>
+              </a:solidFill>
               <a:latin typeface="+mn-lt"/>
             </a:endParaRPr>
           </a:p>
